--- a/assets/lifecycle-f3.pptx
+++ b/assets/lifecycle-f3.pptx
@@ -529,6 +529,13 @@
             <a:r>
               <a:rPr lang="en-US"/>
               <a:t>Verified against vita-fl/dfl/node_server/src/server.ts and ipfs.ts. Workers obtain the finalized global-model CID tuple from blockchain, then retrieve and decrypt its bundle from IPFS (ipfs.ts:380-435). They train locally and send encrypted local updates directly to the current aggregator over authenticated HTTPS (server.ts:463-533, 2110-2180). Local updates are not exchanged through IPFS. The aggregator records accepted submission commitments on blockchain (server.ts:672-702), aggregates updates (server.ts:2313-2330), uploads the encrypted global bundle, signature, and key bundle to IPFS, then commits the CID tuple on blockchain to finalize the round (ipfs.ts:315-346; GMStorage.sol:180-248). AggregatorSelection.sol:171-195 selects the next aggregator; it can select the same participant again. The model is loaded for the next round. Publication arrows summarize operations performed by the aggregator; IPFS does not itself submit blockchain transactions. Blockchain carries references and round state, not model weights. The inference receiver resolves the finalized reference and retrieves the model bundle independently. Source-to-inference arrows show information consumed; the receiver initiates retrieval. Placement in a circle does not define a common TEE or trust boundary. The transparency log is separate from blockchain and records the receiver-issued tool receipt.</a:t>
+            </a:r>
+          </a:p>
+          <a:p/>
+          <a:p>
+            <a:r>
+              <a:rPr lang="en-US"/>
+              <a:t>The Phala remote attestation check below Inference represents appraisal of the receiver's TDX quote through the Phala verifier. The agent consumes the verification result and checks the expected deployment policy. The connector indicates evidence verification, not an additional training step.</a:t>
             </a:r>
           </a:p>
         </p:txBody>
@@ -3954,7 +3961,7 @@
 </p:sldMaster>
 </file>
 
-<file path=ppt/slides/slide3.xml><?xml version="1.0" encoding="utf-8"?>
+<file path=ppt/slides/slide1.xml><?xml version="1.0" encoding="utf-8"?>
 <p:sld xmlns:a="http://schemas.openxmlformats.org/drawingml/2006/main" xmlns:p="http://schemas.openxmlformats.org/presentationml/2006/main" xmlns:r="http://schemas.openxmlformats.org/officeDocument/2006/relationships">
   <p:cSld>
     <p:spTree>
@@ -6030,7 +6037,7 @@
       </p:sp>
       <p:sp>
         <p:nvSpPr>
-          <p:cNvPr id="58" name="Node: Attested / inference"/>
+          <p:cNvPr id="58" name="Node: Inference"/>
           <p:cNvSpPr/>
           <p:nvPr/>
         </p:nvSpPr>
@@ -6075,7 +6082,7 @@
       </p:sp>
       <p:sp>
         <p:nvSpPr>
-          <p:cNvPr id="59" name="Label: Attested / inference"/>
+          <p:cNvPr id="59" name="Label: Inference"/>
           <p:cNvSpPr txBox="1"/>
           <p:nvPr/>
         </p:nvSpPr>
@@ -6103,8 +6110,7 @@
                 </a:solidFill>
                 <a:latin typeface="Arial"/>
               </a:rPr>
-              <a:t>Attested
-inference</a:t>
+              <a:t>Inference</a:t>
             </a:r>
           </a:p>
         </p:txBody>
@@ -6969,6 +6975,156 @@
               </a:rPr>
               <a:t>Transparency
 log</a:t>
+            </a:r>
+          </a:p>
+        </p:txBody>
+      </p:sp>
+      <p:cxnSp>
+        <p:nvCxnSpPr>
+          <p:cNvPr id="82" name="Association: Inference and Phala attestation check"/>
+          <p:cNvCxnSpPr/>
+          <p:nvPr/>
+        </p:nvCxnSpPr>
+        <p:spPr>
+          <a:xfrm>
+            <a:off x="8293608" y="4027932"/>
+            <a:ext cx="0" cy="461772"/>
+          </a:xfrm>
+          <a:prstGeom prst="line">
+            <a:avLst/>
+          </a:prstGeom>
+          <a:ln w="19050">
+            <a:solidFill>
+              <a:srgbClr val="1764A1"/>
+            </a:solidFill>
+          </a:ln>
+        </p:spPr>
+        <p:style>
+          <a:lnRef idx="2">
+            <a:schemeClr val="accent1"/>
+          </a:lnRef>
+          <a:fillRef idx="0">
+            <a:schemeClr val="accent1"/>
+          </a:fillRef>
+          <a:effectRef idx="1">
+            <a:schemeClr val="accent1"/>
+          </a:effectRef>
+          <a:fontRef idx="minor">
+            <a:schemeClr val="tx1"/>
+          </a:fontRef>
+        </p:style>
+      </p:cxnSp>
+      <p:sp>
+        <p:nvSpPr>
+          <p:cNvPr id="83" name="Node: Phala remote attestation check"/>
+          <p:cNvSpPr/>
+          <p:nvPr/>
+        </p:nvSpPr>
+        <p:spPr>
+          <a:xfrm>
+            <a:off x="7004304" y="4489704"/>
+            <a:ext cx="2578608" cy="758952"/>
+          </a:xfrm>
+          <a:prstGeom prst="roundRect">
+            <a:avLst/>
+          </a:prstGeom>
+          <a:solidFill>
+            <a:srgbClr val="EDF4FA"/>
+          </a:solidFill>
+          <a:ln w="12700">
+            <a:solidFill>
+              <a:srgbClr val="1764A1"/>
+            </a:solidFill>
+          </a:ln>
+        </p:spPr>
+        <p:style>
+          <a:lnRef idx="1">
+            <a:schemeClr val="accent1"/>
+          </a:lnRef>
+          <a:fillRef idx="3">
+            <a:schemeClr val="accent1"/>
+          </a:fillRef>
+          <a:effectRef idx="2">
+            <a:schemeClr val="accent1"/>
+          </a:effectRef>
+          <a:fontRef idx="minor">
+            <a:schemeClr val="lt1"/>
+          </a:fontRef>
+        </p:style>
+        <p:txBody>
+          <a:bodyPr rtlCol="0" anchor="ctr"/>
+          <a:lstStyle/>
+          <a:p>
+            <a:pPr algn="ctr"/>
+          </a:p>
+        </p:txBody>
+      </p:sp>
+      <p:sp>
+        <p:nvSpPr>
+          <p:cNvPr id="84" name="Label: Phala"/>
+          <p:cNvSpPr txBox="1"/>
+          <p:nvPr/>
+        </p:nvSpPr>
+        <p:spPr>
+          <a:xfrm>
+            <a:off x="7104888" y="4581144"/>
+            <a:ext cx="2377440" cy="301752"/>
+          </a:xfrm>
+          <a:prstGeom prst="rect">
+            <a:avLst/>
+          </a:prstGeom>
+          <a:noFill/>
+        </p:spPr>
+        <p:txBody>
+          <a:bodyPr wrap="square" lIns="0" rIns="0" tIns="0" bIns="0" anchor="ctr">
+            <a:spAutoFit/>
+          </a:bodyPr>
+          <a:lstStyle/>
+          <a:p>
+            <a:pPr algn="ctr"/>
+            <a:r>
+              <a:rPr sz="1700" b="1" lang="en-US">
+                <a:solidFill>
+                  <a:srgbClr val="1764A1"/>
+                </a:solidFill>
+                <a:latin typeface="Arial"/>
+              </a:rPr>
+              <a:t>Phala</a:t>
+            </a:r>
+          </a:p>
+        </p:txBody>
+      </p:sp>
+      <p:sp>
+        <p:nvSpPr>
+          <p:cNvPr id="85" name="Label: Remote attestation check"/>
+          <p:cNvSpPr txBox="1"/>
+          <p:nvPr/>
+        </p:nvSpPr>
+        <p:spPr>
+          <a:xfrm>
+            <a:off x="7104888" y="4937760"/>
+            <a:ext cx="2377440" cy="228600"/>
+          </a:xfrm>
+          <a:prstGeom prst="rect">
+            <a:avLst/>
+          </a:prstGeom>
+          <a:noFill/>
+        </p:spPr>
+        <p:txBody>
+          <a:bodyPr wrap="square" lIns="0" rIns="0" tIns="0" bIns="0" anchor="ctr">
+            <a:spAutoFit/>
+          </a:bodyPr>
+          <a:lstStyle/>
+          <a:p>
+            <a:pPr algn="ctr"/>
+            <a:r>
+              <a:rPr sz="1230" b="0" lang="en-US">
+                <a:solidFill>
+                  <a:srgbClr val="1764A1"/>
+                </a:solidFill>
+                <a:latin typeface="Arial"/>
+              </a:rPr>
+              <a:t>Remote attestation check</a:t>
             </a:r>
           </a:p>
         </p:txBody>
